--- a/02_Presentaciones/01_Presentacion_Consultora_RumboGlobal.pptx
+++ b/02_Presentaciones/01_Presentacion_Consultora_RumboGlobal.pptx
@@ -4547,13 +4547,13 @@
               </a:spcAft>
             </a:pPr>
             <a:r>
-              <a:rPr sz="5400" b="1" i="0">
+              <a:rPr sz="2400" b="1" i="0">
                 <a:solidFill>
                   <a:srgbClr val="D0021B"/>
                 </a:solidFill>
                 <a:latin typeface="Arial"/>
               </a:rPr>
-              <a:t>4</a:t>
+              <a:t>Mundo</a:t>
             </a:r>
           </a:p>
         </p:txBody>
@@ -4595,7 +4595,7 @@
                 </a:solidFill>
                 <a:latin typeface="Calibri"/>
               </a:rPr>
-              <a:t>países de Medio Oriente en nuestro proyecto actual</a:t>
+              <a:t>sin límite de países: cada proyecto elige su mercado</a:t>
             </a:r>
           </a:p>
         </p:txBody>
@@ -4809,7 +4809,7 @@
                 </a:solidFill>
                 <a:latin typeface="Arial"/>
               </a:rPr>
-              <a:t>3</a:t>
+              <a:t>8</a:t>
             </a:r>
           </a:p>
         </p:txBody>
@@ -4851,7 +4851,7 @@
                 </a:solidFill>
                 <a:latin typeface="Calibri"/>
               </a:rPr>
-              <a:t>idiomas de trabajo: español, inglés y árabe</a:t>
+              <a:t>idiomas en nuestro sitio web</a:t>
             </a:r>
           </a:p>
         </p:txBody>
